--- a/public/fun/pack/pptx/weddingpro/결혼식프리미엄_32_러브스토리중심_토프아이보리.pptx
+++ b/public/fun/pack/pptx/weddingpro/결혼식프리미엄_32_러브스토리중심_토프아이보리.pptx
@@ -113,12 +113,12 @@
   <p:extLst>
     <p:ext uri="{521415D9-36F7-43E2-AB2F-B90AF26B5E84}">
       <p14:sectionLst xmlns:p14="http://schemas.microsoft.com/office/powerpoint/2010/main">
-        <p14:section name="시작" id="{A526AA25-963C-4383-A565-37BDBAB894A2}">
+        <p14:section name="시작" id="{9A25CC93-DDA7-4F51-A609-101311113348}">
           <p14:sldIdLst>
             <p14:sldId id="256"/>
           </p14:sldIdLst>
         </p14:section>
-        <p14:section name="본문" id="{4D04536F-FABA-4F7D-80DE-64F0005CD7DF}">
+        <p14:section name="본문" id="{4A95425D-D278-45A6-BC72-CF241D4ED5F9}">
           <p14:sldIdLst>
             <p14:sldId id="257"/>
             <p14:sldId id="258"/>
@@ -127,7 +127,7 @@
             <p14:sldId id="261"/>
           </p14:sldIdLst>
         </p14:section>
-        <p14:section name="마무리" id="{B8B66505-001D-4C77-BC34-30BBACA6F327}">
+        <p14:section name="마무리" id="{FA0E18FD-5E63-422B-9874-A6EAD3343740}">
           <p14:sldIdLst>
             <p14:sldId id="262"/>
           </p14:sldIdLst>
@@ -1479,7 +1479,7 @@
             </a:lvl1pPr>
           </a:lstStyle>
           <a:p>
-            <a:fld id="{BABF10A6-FA31-40B2-BC0C-B02663E0A8E3}" type="slidenum">
+            <a:fld id="{1B773138-4954-4AFE-9D45-DAD334089355}" type="slidenum">
               <a:rPr lang="en-US"/>
               <a:t>‹#›</a:t>
             </a:fld>
@@ -2158,7 +2158,7 @@
             </a:lvl1pPr>
           </a:lstStyle>
           <a:p>
-            <a:fld id="{E1EF8807-FCEC-4E71-80A4-1FF1E93591E1}" type="slidenum">
+            <a:fld id="{F21BC3D8-BBFA-43B6-BFDE-5F536FBB148E}" type="slidenum">
               <a:rPr lang="en-US"/>
               <a:t>‹#›</a:t>
             </a:fld>
@@ -2846,7 +2846,7 @@
             </a:lvl1pPr>
           </a:lstStyle>
           <a:p>
-            <a:fld id="{BA865434-7C42-4899-B078-D7AE8E464F57}" type="slidenum">
+            <a:fld id="{E2BEB19F-4881-4C07-8D9F-38689CCF1DFC}" type="slidenum">
               <a:rPr lang="en-US"/>
               <a:t>‹#›</a:t>
             </a:fld>
@@ -3763,7 +3763,7 @@
           <a:p>
             <a:r>
               <a:rPr lang="ko-KR"/>
-              <a:t>0000. 00. 00 · 예식장 이름</a:t>
+              <a:t>날짜 입력 · 예식장 이름</a:t>
             </a:r>
           </a:p>
         </p:txBody>
@@ -3986,7 +3986,7 @@
           <a:bodyPr/>
           <a:lstStyle/>
           <a:p>
-            <a:fld id="{941E7196-BE14-4028-B6FF-F780FD7EF008}" type="slidenum">
+            <a:fld id="{B0DE9A7C-743E-4CF9-998B-22FE81E6E906}" type="slidenum">
               <a:rPr lang="en-US"/>
               <a:t>‹#›</a:t>
             </a:fld>
@@ -4438,7 +4438,7 @@
           <a:bodyPr/>
           <a:lstStyle/>
           <a:p>
-            <a:fld id="{1C80819E-08F6-48A5-AB7F-1FF729F4F274}" type="slidenum">
+            <a:fld id="{854A64B5-FC24-43D2-A89C-3B45A4009A61}" type="slidenum">
               <a:rPr lang="en-US"/>
               <a:t>‹#›</a:t>
             </a:fld>
@@ -5413,7 +5413,7 @@
           <a:bodyPr/>
           <a:lstStyle/>
           <a:p>
-            <a:fld id="{FEFBF352-DAB7-4CD6-A482-C4CE77DB9082}" type="slidenum">
+            <a:fld id="{349494F5-2250-42A7-87F7-3894AC80F2D3}" type="slidenum">
               <a:rPr lang="en-US"/>
               <a:t>‹#›</a:t>
             </a:fld>
@@ -7027,7 +7027,7 @@
           <a:bodyPr/>
           <a:lstStyle/>
           <a:p>
-            <a:fld id="{71C8E854-1D42-4ABA-B15E-A915B2379EC7}" type="slidenum">
+            <a:fld id="{F205CA43-0F60-4D50-A831-90D01A6EFF6F}" type="slidenum">
               <a:rPr lang="en-US"/>
               <a:t>‹#›</a:t>
             </a:fld>
@@ -7115,7 +7115,7 @@
           <a:bodyPr/>
           <a:lstStyle/>
           <a:p>
-            <a:fld id="{F62F0780-711C-411C-B890-FA665E8BAC81}" type="slidenum">
+            <a:fld id="{7501DE88-8B8E-4ECF-80E1-0BE3A5BB233B}" type="slidenum">
               <a:rPr lang="en-US"/>
               <a:t>‹#›</a:t>
             </a:fld>
